--- a/reports/presentation/EDA_NBA_Carlos_tendencias_lanzamiento.pptx
+++ b/reports/presentation/EDA_NBA_Carlos_tendencias_lanzamiento.pptx
@@ -5286,7 +5286,7 @@
               <a:buNone/>
             </a:pPr>
             <a:r>
-              <a:rPr lang="en-US" sz="2700" b="1" dirty="0">
+              <a:rPr lang="en-US" sz="2700" b="1" dirty="0" err="1">
                 <a:solidFill>
                   <a:srgbClr val="F8FAFC"/>
                 </a:solidFill>
@@ -5294,7 +5294,29 @@
                 <a:ea typeface="Aptos Display" pitchFamily="34" charset="-122"/>
                 <a:cs typeface="Aptos Display" pitchFamily="34" charset="-120"/>
               </a:rPr>
-              <a:t>Conclusiones de la rama</a:t>
+              <a:t>Conclusiones</a:t>
+            </a:r>
+            <a:r>
+              <a:rPr lang="en-US" sz="2700" b="1" dirty="0">
+                <a:solidFill>
+                  <a:srgbClr val="F8FAFC"/>
+                </a:solidFill>
+                <a:latin typeface="Aptos Display" pitchFamily="34" charset="0"/>
+                <a:ea typeface="Aptos Display" pitchFamily="34" charset="-122"/>
+                <a:cs typeface="Aptos Display" pitchFamily="34" charset="-120"/>
+              </a:rPr>
+              <a:t> de la </a:t>
+            </a:r>
+            <a:r>
+              <a:rPr lang="en-US" sz="2700" b="1" dirty="0" err="1">
+                <a:solidFill>
+                  <a:srgbClr val="F8FAFC"/>
+                </a:solidFill>
+                <a:latin typeface="Aptos Display" pitchFamily="34" charset="0"/>
+                <a:ea typeface="Aptos Display" pitchFamily="34" charset="-122"/>
+                <a:cs typeface="Aptos Display" pitchFamily="34" charset="-120"/>
+              </a:rPr>
+              <a:t>rama</a:t>
             </a:r>
             <a:endParaRPr lang="en-US" sz="2700" dirty="0"/>
           </a:p>
